--- a/wanqing/deliverables/architecture_verified.pptx
+++ b/wanqing/deliverables/architecture_verified.pptx
@@ -2,13 +2,13 @@
 <file path=ppt/presentation.xml><?xml version="1.0" encoding="utf-8"?>
 <p:presentation xmlns:p="http://schemas.openxmlformats.org/presentationml/2006/main">
   <p:sldMasterIdLst>
-    <p:sldMasterId xmlns:r="http://schemas.openxmlformats.org/officeDocument/2006/relationships" id="2147483648" r:id="Rb0ded68291784672"/>
+    <p:sldMasterId xmlns:r="http://schemas.openxmlformats.org/officeDocument/2006/relationships" id="2147483648" r:id="Rc67621419b0e4916"/>
   </p:sldMasterIdLst>
   <p:notesMasterIdLst>
-    <p:notesMasterId xmlns:r="http://schemas.openxmlformats.org/officeDocument/2006/relationships" r:id="Ra3ecd59dbbdf400a"/>
+    <p:notesMasterId xmlns:r="http://schemas.openxmlformats.org/officeDocument/2006/relationships" r:id="Rb7314fa51c3b4e96"/>
   </p:notesMasterIdLst>
   <p:sldIdLst>
-    <p:sldId xmlns:r="http://schemas.openxmlformats.org/officeDocument/2006/relationships" id="256" r:id="R1f90deec93ca4940"/>
+    <p:sldId xmlns:r="http://schemas.openxmlformats.org/officeDocument/2006/relationships" id="256" r:id="Rf0e1fd0cca164776"/>
   </p:sldIdLst>
   <p:sldSz cx="12192000" cy="6858000"/>
   <p:notesSz cx="6858000" cy="9144000"/>
@@ -565,7 +565,7 @@
   </p:cSld>
   <p:clrMap bg1="lt1" tx1="dk1" bg2="lt2" tx2="dk2" accent1="accent1" accent2="accent2" accent3="accent3" accent4="accent4" accent5="accent5" accent6="accent6" hlink="hlink" folHlink="folHlink"/>
   <p:sldLayoutIdLst>
-    <p:sldLayoutId xmlns:r="http://schemas.openxmlformats.org/officeDocument/2006/relationships" id="2147483649" r:id="R49a183674b754c1f"/>
+    <p:sldLayoutId xmlns:r="http://schemas.openxmlformats.org/officeDocument/2006/relationships" id="2147483649" r:id="R2350e5590e1b4c45"/>
   </p:sldLayoutIdLst>
   <p:txStyles>
     <p:titleStyle>
@@ -1116,7 +1116,7 @@
           <p:cNvPr id="107" name="title-1">
             <a:extLst xmlns:a="http://schemas.openxmlformats.org/drawingml/2006/main">
               <a:ext uri="{FF2B5EF4-FFF2-40B4-BE49-F238E27FC236}">
-                <a16:creationId xmlns:a16="http://schemas.microsoft.com/office/drawing/2014/main" id="{3F548296-FE71-409A-BE33-63ADC8B3CA2B}"/>
+                <a16:creationId xmlns:a16="http://schemas.microsoft.com/office/drawing/2014/main" id="{1665FC2D-0B54-48C4-9A8E-6914B97F5C65}"/>
               </a:ext>
             </a:extLst>
           </p:cNvPr>
@@ -1172,7 +1172,7 @@
           <p:cNvPr id="2" name="subtitle-2">
             <a:extLst xmlns:a="http://schemas.openxmlformats.org/drawingml/2006/main">
               <a:ext uri="{FF2B5EF4-FFF2-40B4-BE49-F238E27FC236}">
-                <a16:creationId xmlns:a16="http://schemas.microsoft.com/office/drawing/2014/main" id="{FBA94887-6221-47F8-9010-15C7BF591E2E}"/>
+                <a16:creationId xmlns:a16="http://schemas.microsoft.com/office/drawing/2014/main" id="{03D17DD9-9DC8-4B67-85DF-FC2D3749293F}"/>
               </a:ext>
             </a:extLst>
           </p:cNvPr>
@@ -1228,7 +1228,7 @@
           <p:cNvPr id="3" name="title-rule-3">
             <a:extLst xmlns:a="http://schemas.openxmlformats.org/drawingml/2006/main">
               <a:ext uri="{FF2B5EF4-FFF2-40B4-BE49-F238E27FC236}">
-                <a16:creationId xmlns:a16="http://schemas.microsoft.com/office/drawing/2014/main" id="{B96AEC8C-D952-4478-9CC4-725FB48AE413}"/>
+                <a16:creationId xmlns:a16="http://schemas.microsoft.com/office/drawing/2014/main" id="{E95797CD-B3DA-48D8-866E-B01071216FD5}"/>
               </a:ext>
             </a:extLst>
           </p:cNvPr>
@@ -1261,7 +1261,7 @@
           <p:cNvPr id="4" name="legend-blue-4">
             <a:extLst xmlns:a="http://schemas.openxmlformats.org/drawingml/2006/main">
               <a:ext uri="{FF2B5EF4-FFF2-40B4-BE49-F238E27FC236}">
-                <a16:creationId xmlns:a16="http://schemas.microsoft.com/office/drawing/2014/main" id="{3E6F3D22-B4D6-4E3F-B373-5012F8405D89}"/>
+                <a16:creationId xmlns:a16="http://schemas.microsoft.com/office/drawing/2014/main" id="{18DE1E86-0EFA-4849-8894-4C6A29AEECB7}"/>
               </a:ext>
             </a:extLst>
           </p:cNvPr>
@@ -1294,7 +1294,7 @@
           <p:cNvPr id="5" name="legend-blue-text-5">
             <a:extLst xmlns:a="http://schemas.openxmlformats.org/drawingml/2006/main">
               <a:ext uri="{FF2B5EF4-FFF2-40B4-BE49-F238E27FC236}">
-                <a16:creationId xmlns:a16="http://schemas.microsoft.com/office/drawing/2014/main" id="{2FFEA742-A02F-4E08-BBEF-29FBEB83AD17}"/>
+                <a16:creationId xmlns:a16="http://schemas.microsoft.com/office/drawing/2014/main" id="{9F69251C-2B6B-47BB-B684-03C63DCBE7F5}"/>
               </a:ext>
             </a:extLst>
           </p:cNvPr>
@@ -1350,7 +1350,7 @@
           <p:cNvPr id="6" name="legend-green-6">
             <a:extLst xmlns:a="http://schemas.openxmlformats.org/drawingml/2006/main">
               <a:ext uri="{FF2B5EF4-FFF2-40B4-BE49-F238E27FC236}">
-                <a16:creationId xmlns:a16="http://schemas.microsoft.com/office/drawing/2014/main" id="{2463F837-60DA-4FD8-834D-096205E39252}"/>
+                <a16:creationId xmlns:a16="http://schemas.microsoft.com/office/drawing/2014/main" id="{FDBF02E4-9863-42D8-8DA2-E3E9E4BE7ABD}"/>
               </a:ext>
             </a:extLst>
           </p:cNvPr>
@@ -1383,7 +1383,7 @@
           <p:cNvPr id="7" name="legend-green-text-7">
             <a:extLst xmlns:a="http://schemas.openxmlformats.org/drawingml/2006/main">
               <a:ext uri="{FF2B5EF4-FFF2-40B4-BE49-F238E27FC236}">
-                <a16:creationId xmlns:a16="http://schemas.microsoft.com/office/drawing/2014/main" id="{2DAF5B41-E0E9-416D-AC50-DE1645832CE4}"/>
+                <a16:creationId xmlns:a16="http://schemas.microsoft.com/office/drawing/2014/main" id="{5990A77F-5B44-4545-9CBA-3C1E7A0E38DA}"/>
               </a:ext>
             </a:extLst>
           </p:cNvPr>
@@ -1439,7 +1439,7 @@
           <p:cNvPr id="8" name="legend-orange-8">
             <a:extLst xmlns:a="http://schemas.openxmlformats.org/drawingml/2006/main">
               <a:ext uri="{FF2B5EF4-FFF2-40B4-BE49-F238E27FC236}">
-                <a16:creationId xmlns:a16="http://schemas.microsoft.com/office/drawing/2014/main" id="{7F47A469-6BD0-4638-B1B1-AECA11A444D6}"/>
+                <a16:creationId xmlns:a16="http://schemas.microsoft.com/office/drawing/2014/main" id="{39810417-6B6B-4403-8A34-2A72BE98A9D8}"/>
               </a:ext>
             </a:extLst>
           </p:cNvPr>
@@ -1472,7 +1472,7 @@
           <p:cNvPr id="9" name="legend-orange-text-9">
             <a:extLst xmlns:a="http://schemas.openxmlformats.org/drawingml/2006/main">
               <a:ext uri="{FF2B5EF4-FFF2-40B4-BE49-F238E27FC236}">
-                <a16:creationId xmlns:a16="http://schemas.microsoft.com/office/drawing/2014/main" id="{762AA7A0-872E-4E34-B315-1C20738C661B}"/>
+                <a16:creationId xmlns:a16="http://schemas.microsoft.com/office/drawing/2014/main" id="{749E6A87-8ED3-4361-9078-38F6FFDDBE5F}"/>
               </a:ext>
             </a:extLst>
           </p:cNvPr>
@@ -1528,7 +1528,7 @@
           <p:cNvPr id="10" name="stage-input-10">
             <a:extLst xmlns:a="http://schemas.openxmlformats.org/drawingml/2006/main">
               <a:ext uri="{FF2B5EF4-FFF2-40B4-BE49-F238E27FC236}">
-                <a16:creationId xmlns:a16="http://schemas.microsoft.com/office/drawing/2014/main" id="{7ED370EB-74BF-456D-8E83-5B4D14014C8A}"/>
+                <a16:creationId xmlns:a16="http://schemas.microsoft.com/office/drawing/2014/main" id="{1B48AF78-660C-4BC8-A65A-FAA2F05DF69F}"/>
               </a:ext>
             </a:extLst>
           </p:cNvPr>
@@ -1563,7 +1563,7 @@
           <p:cNvPr id="11" name="stage-device-11">
             <a:extLst xmlns:a="http://schemas.openxmlformats.org/drawingml/2006/main">
               <a:ext uri="{FF2B5EF4-FFF2-40B4-BE49-F238E27FC236}">
-                <a16:creationId xmlns:a16="http://schemas.microsoft.com/office/drawing/2014/main" id="{4E79CE3C-EC9B-4388-B3EE-811895F1F852}"/>
+                <a16:creationId xmlns:a16="http://schemas.microsoft.com/office/drawing/2014/main" id="{767C4AFA-7BC1-4813-9164-11D7C714C7A9}"/>
               </a:ext>
             </a:extLst>
           </p:cNvPr>
@@ -1598,7 +1598,7 @@
           <p:cNvPr id="12" name="stage-connection-12">
             <a:extLst xmlns:a="http://schemas.openxmlformats.org/drawingml/2006/main">
               <a:ext uri="{FF2B5EF4-FFF2-40B4-BE49-F238E27FC236}">
-                <a16:creationId xmlns:a16="http://schemas.microsoft.com/office/drawing/2014/main" id="{6CF4172D-E8A0-4119-9200-EDA5BF809201}"/>
+                <a16:creationId xmlns:a16="http://schemas.microsoft.com/office/drawing/2014/main" id="{9F11AF75-4002-4CA8-B033-72129A30552B}"/>
               </a:ext>
             </a:extLst>
           </p:cNvPr>
@@ -1633,7 +1633,7 @@
           <p:cNvPr id="13" name="stage-intelligence-13">
             <a:extLst xmlns:a="http://schemas.openxmlformats.org/drawingml/2006/main">
               <a:ext uri="{FF2B5EF4-FFF2-40B4-BE49-F238E27FC236}">
-                <a16:creationId xmlns:a16="http://schemas.microsoft.com/office/drawing/2014/main" id="{A019C9C2-F29F-4D65-B408-CACA37F41A82}"/>
+                <a16:creationId xmlns:a16="http://schemas.microsoft.com/office/drawing/2014/main" id="{2024B673-44AB-494A-A0F0-B36DF5CF60F0}"/>
               </a:ext>
             </a:extLst>
           </p:cNvPr>
@@ -1668,7 +1668,7 @@
           <p:cNvPr id="14" name="stage-output-14">
             <a:extLst xmlns:a="http://schemas.openxmlformats.org/drawingml/2006/main">
               <a:ext uri="{FF2B5EF4-FFF2-40B4-BE49-F238E27FC236}">
-                <a16:creationId xmlns:a16="http://schemas.microsoft.com/office/drawing/2014/main" id="{95C553DC-CB8C-4687-BC90-43051FF19781}"/>
+                <a16:creationId xmlns:a16="http://schemas.microsoft.com/office/drawing/2014/main" id="{9F7C4E28-5BF3-4BFE-B1DB-42FB3AEEA201}"/>
               </a:ext>
             </a:extLst>
           </p:cNvPr>
@@ -1703,7 +1703,7 @@
           <p:cNvPr id="15" name="stage-mapping-15">
             <a:extLst xmlns:a="http://schemas.openxmlformats.org/drawingml/2006/main">
               <a:ext uri="{FF2B5EF4-FFF2-40B4-BE49-F238E27FC236}">
-                <a16:creationId xmlns:a16="http://schemas.microsoft.com/office/drawing/2014/main" id="{03C7688F-5DC5-461D-9DC8-968266B11153}"/>
+                <a16:creationId xmlns:a16="http://schemas.microsoft.com/office/drawing/2014/main" id="{2BFE1449-510E-4933-841E-E2A40A76CFB8}"/>
               </a:ext>
             </a:extLst>
           </p:cNvPr>
@@ -1915,7 +1915,7 @@
           <p:cNvPr id="23" name="pending-path-arrow-18">
             <a:extLst xmlns:a="http://schemas.openxmlformats.org/drawingml/2006/main">
               <a:ext uri="{FF2B5EF4-FFF2-40B4-BE49-F238E27FC236}">
-                <a16:creationId xmlns:a16="http://schemas.microsoft.com/office/drawing/2014/main" id="{1547FE13-E95A-4F5A-980B-0AD70B269330}"/>
+                <a16:creationId xmlns:a16="http://schemas.microsoft.com/office/drawing/2014/main" id="{79D0B29D-7041-4855-95A9-EB7A1E5AA92A}"/>
               </a:ext>
             </a:extLst>
           </p:cNvPr>
@@ -1948,7 +1948,7 @@
           <p:cNvPr id="24" name="stage-title-01-19">
             <a:extLst xmlns:a="http://schemas.openxmlformats.org/drawingml/2006/main">
               <a:ext uri="{FF2B5EF4-FFF2-40B4-BE49-F238E27FC236}">
-                <a16:creationId xmlns:a16="http://schemas.microsoft.com/office/drawing/2014/main" id="{376082D1-6DEA-4606-A08E-DD2EACEF1CFF}"/>
+                <a16:creationId xmlns:a16="http://schemas.microsoft.com/office/drawing/2014/main" id="{A54BCC0F-9469-4FDA-8349-2878BA15783E}"/>
               </a:ext>
             </a:extLst>
           </p:cNvPr>
@@ -2004,7 +2004,7 @@
           <p:cNvPr id="25" name="stage-title-02-20">
             <a:extLst xmlns:a="http://schemas.openxmlformats.org/drawingml/2006/main">
               <a:ext uri="{FF2B5EF4-FFF2-40B4-BE49-F238E27FC236}">
-                <a16:creationId xmlns:a16="http://schemas.microsoft.com/office/drawing/2014/main" id="{6E60F942-010F-4C4D-A47F-2FEFC228EEC7}"/>
+                <a16:creationId xmlns:a16="http://schemas.microsoft.com/office/drawing/2014/main" id="{376401B2-BE04-4639-9C70-27BEC67FB00B}"/>
               </a:ext>
             </a:extLst>
           </p:cNvPr>
@@ -2060,7 +2060,7 @@
           <p:cNvPr id="26" name="stage-title-03-21">
             <a:extLst xmlns:a="http://schemas.openxmlformats.org/drawingml/2006/main">
               <a:ext uri="{FF2B5EF4-FFF2-40B4-BE49-F238E27FC236}">
-                <a16:creationId xmlns:a16="http://schemas.microsoft.com/office/drawing/2014/main" id="{48887A83-453B-4A55-91DF-AA2CF4FDD542}"/>
+                <a16:creationId xmlns:a16="http://schemas.microsoft.com/office/drawing/2014/main" id="{EDC17187-A3F5-4265-A3BD-6DFDB40D5F92}"/>
               </a:ext>
             </a:extLst>
           </p:cNvPr>
@@ -2116,7 +2116,7 @@
           <p:cNvPr id="27" name="stage-title-04-22">
             <a:extLst xmlns:a="http://schemas.openxmlformats.org/drawingml/2006/main">
               <a:ext uri="{FF2B5EF4-FFF2-40B4-BE49-F238E27FC236}">
-                <a16:creationId xmlns:a16="http://schemas.microsoft.com/office/drawing/2014/main" id="{1DBC97F2-C297-481F-ABBA-76F5DBC5320A}"/>
+                <a16:creationId xmlns:a16="http://schemas.microsoft.com/office/drawing/2014/main" id="{9F76A6D1-1D3F-478C-901A-0A21E736490A}"/>
               </a:ext>
             </a:extLst>
           </p:cNvPr>
@@ -2172,7 +2172,7 @@
           <p:cNvPr id="28" name="gpio-label-bg-23">
             <a:extLst xmlns:a="http://schemas.openxmlformats.org/drawingml/2006/main">
               <a:ext uri="{FF2B5EF4-FFF2-40B4-BE49-F238E27FC236}">
-                <a16:creationId xmlns:a16="http://schemas.microsoft.com/office/drawing/2014/main" id="{6C236BC9-0E5C-467D-9B9D-927429AC9BB1}"/>
+                <a16:creationId xmlns:a16="http://schemas.microsoft.com/office/drawing/2014/main" id="{0580EAEB-DCEF-4D66-BBE3-59FACD4E86B0}"/>
               </a:ext>
             </a:extLst>
           </p:cNvPr>
@@ -2207,7 +2207,7 @@
           <p:cNvPr id="29" name="gpio-label-24">
             <a:extLst xmlns:a="http://schemas.openxmlformats.org/drawingml/2006/main">
               <a:ext uri="{FF2B5EF4-FFF2-40B4-BE49-F238E27FC236}">
-                <a16:creationId xmlns:a16="http://schemas.microsoft.com/office/drawing/2014/main" id="{C74BFDF9-71B9-4165-B9EA-953254DA4848}"/>
+                <a16:creationId xmlns:a16="http://schemas.microsoft.com/office/drawing/2014/main" id="{5A4924CB-0803-4697-93BE-EB1D45F7CCF5}"/>
               </a:ext>
             </a:extLst>
           </p:cNvPr>
@@ -2286,7 +2286,7 @@
           <p:cNvPr id="30" name="ble-label-bg-25">
             <a:extLst xmlns:a="http://schemas.openxmlformats.org/drawingml/2006/main">
               <a:ext uri="{FF2B5EF4-FFF2-40B4-BE49-F238E27FC236}">
-                <a16:creationId xmlns:a16="http://schemas.microsoft.com/office/drawing/2014/main" id="{C5B01E05-3370-4960-AAF6-D6BB121652BD}"/>
+                <a16:creationId xmlns:a16="http://schemas.microsoft.com/office/drawing/2014/main" id="{D7091C81-F832-47C7-BCEE-D60EC9D7285D}"/>
               </a:ext>
             </a:extLst>
           </p:cNvPr>
@@ -2321,7 +2321,7 @@
           <p:cNvPr id="31" name="ble-label-26">
             <a:extLst xmlns:a="http://schemas.openxmlformats.org/drawingml/2006/main">
               <a:ext uri="{FF2B5EF4-FFF2-40B4-BE49-F238E27FC236}">
-                <a16:creationId xmlns:a16="http://schemas.microsoft.com/office/drawing/2014/main" id="{EEC73907-8172-411B-A8C1-3A5BCCF4474A}"/>
+                <a16:creationId xmlns:a16="http://schemas.microsoft.com/office/drawing/2014/main" id="{97D01AB2-61B7-40E6-967D-39B365C3EB2E}"/>
               </a:ext>
             </a:extLst>
           </p:cNvPr>
@@ -2400,7 +2400,7 @@
           <p:cNvPr id="32" name="http-label-bg-27">
             <a:extLst xmlns:a="http://schemas.openxmlformats.org/drawingml/2006/main">
               <a:ext uri="{FF2B5EF4-FFF2-40B4-BE49-F238E27FC236}">
-                <a16:creationId xmlns:a16="http://schemas.microsoft.com/office/drawing/2014/main" id="{64F34AE2-2614-4B15-8612-2CEAAA762BFB}"/>
+                <a16:creationId xmlns:a16="http://schemas.microsoft.com/office/drawing/2014/main" id="{5F19F8E8-A77D-483A-A2EE-3C7BE0404D50}"/>
               </a:ext>
             </a:extLst>
           </p:cNvPr>
@@ -2435,7 +2435,7 @@
           <p:cNvPr id="33" name="http-label-28">
             <a:extLst xmlns:a="http://schemas.openxmlformats.org/drawingml/2006/main">
               <a:ext uri="{FF2B5EF4-FFF2-40B4-BE49-F238E27FC236}">
-                <a16:creationId xmlns:a16="http://schemas.microsoft.com/office/drawing/2014/main" id="{AB4DA27D-42C3-4EFF-8CCD-12DFBFEEC49A}"/>
+                <a16:creationId xmlns:a16="http://schemas.microsoft.com/office/drawing/2014/main" id="{F7674466-8CD8-45AE-AF10-86AEA0A6380E}"/>
               </a:ext>
             </a:extLst>
           </p:cNvPr>
@@ -2514,7 +2514,7 @@
           <p:cNvPr id="34" name="return-label-bg-29">
             <a:extLst xmlns:a="http://schemas.openxmlformats.org/drawingml/2006/main">
               <a:ext uri="{FF2B5EF4-FFF2-40B4-BE49-F238E27FC236}">
-                <a16:creationId xmlns:a16="http://schemas.microsoft.com/office/drawing/2014/main" id="{89256D5B-FB3A-4C6F-91C8-FF991C363F8C}"/>
+                <a16:creationId xmlns:a16="http://schemas.microsoft.com/office/drawing/2014/main" id="{08E0B4BF-B912-445D-BA29-FDADB6A702FB}"/>
               </a:ext>
             </a:extLst>
           </p:cNvPr>
@@ -2549,7 +2549,7 @@
           <p:cNvPr id="35" name="return-label-30">
             <a:extLst xmlns:a="http://schemas.openxmlformats.org/drawingml/2006/main">
               <a:ext uri="{FF2B5EF4-FFF2-40B4-BE49-F238E27FC236}">
-                <a16:creationId xmlns:a16="http://schemas.microsoft.com/office/drawing/2014/main" id="{76D459A5-5E84-4F35-86A4-93BDAD75ED7B}"/>
+                <a16:creationId xmlns:a16="http://schemas.microsoft.com/office/drawing/2014/main" id="{038BF6CC-4FCC-450D-BCF2-A3EB7B058261}"/>
               </a:ext>
             </a:extLst>
           </p:cNvPr>
@@ -2605,7 +2605,7 @@
           <p:cNvPr id="36" name="pending-label-bg-31">
             <a:extLst xmlns:a="http://schemas.openxmlformats.org/drawingml/2006/main">
               <a:ext uri="{FF2B5EF4-FFF2-40B4-BE49-F238E27FC236}">
-                <a16:creationId xmlns:a16="http://schemas.microsoft.com/office/drawing/2014/main" id="{6A9D6C3D-2E82-45B3-8D41-901D4ABF5442}"/>
+                <a16:creationId xmlns:a16="http://schemas.microsoft.com/office/drawing/2014/main" id="{90DC1B7F-1A84-46E7-8865-A8E4035AB4B4}"/>
               </a:ext>
             </a:extLst>
           </p:cNvPr>
@@ -2640,7 +2640,7 @@
           <p:cNvPr id="37" name="pending-label-32">
             <a:extLst xmlns:a="http://schemas.openxmlformats.org/drawingml/2006/main">
               <a:ext uri="{FF2B5EF4-FFF2-40B4-BE49-F238E27FC236}">
-                <a16:creationId xmlns:a16="http://schemas.microsoft.com/office/drawing/2014/main" id="{408DB57C-E90C-47B0-9666-74FF5E659D32}"/>
+                <a16:creationId xmlns:a16="http://schemas.microsoft.com/office/drawing/2014/main" id="{7C834FB0-40A1-4360-994F-7B10D56ADA76}"/>
               </a:ext>
             </a:extLst>
           </p:cNvPr>
@@ -2696,7 +2696,7 @@
           <p:cNvPr id="38" name="input-body-33">
             <a:extLst xmlns:a="http://schemas.openxmlformats.org/drawingml/2006/main">
               <a:ext uri="{FF2B5EF4-FFF2-40B4-BE49-F238E27FC236}">
-                <a16:creationId xmlns:a16="http://schemas.microsoft.com/office/drawing/2014/main" id="{F6A4AFAC-51E1-443A-BD7F-80AE06E8C84B}"/>
+                <a16:creationId xmlns:a16="http://schemas.microsoft.com/office/drawing/2014/main" id="{B8491BA2-FD14-4EFF-89E2-7B373A2EFBCA}"/>
               </a:ext>
             </a:extLst>
           </p:cNvPr>
@@ -2877,7 +2877,7 @@
           <p:cNvPr id="39" name="module-ROROLEE-Basic-34">
             <a:extLst xmlns:a="http://schemas.openxmlformats.org/drawingml/2006/main">
               <a:ext uri="{FF2B5EF4-FFF2-40B4-BE49-F238E27FC236}">
-                <a16:creationId xmlns:a16="http://schemas.microsoft.com/office/drawing/2014/main" id="{EE634A32-D6FD-4A95-9B58-25C8D5F7B300}"/>
+                <a16:creationId xmlns:a16="http://schemas.microsoft.com/office/drawing/2014/main" id="{16A26E09-119D-41ED-9D62-CFFF82DA046E}"/>
               </a:ext>
             </a:extLst>
           </p:cNvPr>
@@ -2912,7 +2912,7 @@
           <p:cNvPr id="40" name="module-title-ROROLEE-Basic-35">
             <a:extLst xmlns:a="http://schemas.openxmlformats.org/drawingml/2006/main">
               <a:ext uri="{FF2B5EF4-FFF2-40B4-BE49-F238E27FC236}">
-                <a16:creationId xmlns:a16="http://schemas.microsoft.com/office/drawing/2014/main" id="{76AB1AB7-449F-4A90-9094-D476383D131B}"/>
+                <a16:creationId xmlns:a16="http://schemas.microsoft.com/office/drawing/2014/main" id="{BB88AF27-61F5-40A1-8DEC-6F1A36F5535A}"/>
               </a:ext>
             </a:extLst>
           </p:cNvPr>
@@ -2968,7 +2968,7 @@
           <p:cNvPr id="41" name="badge-提供-36">
             <a:extLst xmlns:a="http://schemas.openxmlformats.org/drawingml/2006/main">
               <a:ext uri="{FF2B5EF4-FFF2-40B4-BE49-F238E27FC236}">
-                <a16:creationId xmlns:a16="http://schemas.microsoft.com/office/drawing/2014/main" id="{589276F9-801E-4CF4-BB93-8E8D3C1FAB70}"/>
+                <a16:creationId xmlns:a16="http://schemas.microsoft.com/office/drawing/2014/main" id="{72C6663D-5781-4A75-8C30-7E7BF9CFBFA0}"/>
               </a:ext>
             </a:extLst>
           </p:cNvPr>
@@ -3003,7 +3003,7 @@
           <p:cNvPr id="42" name="badge-text-提供-37">
             <a:extLst xmlns:a="http://schemas.openxmlformats.org/drawingml/2006/main">
               <a:ext uri="{FF2B5EF4-FFF2-40B4-BE49-F238E27FC236}">
-                <a16:creationId xmlns:a16="http://schemas.microsoft.com/office/drawing/2014/main" id="{B3F8EE75-75E2-4B7D-AFE8-77F81B60432F}"/>
+                <a16:creationId xmlns:a16="http://schemas.microsoft.com/office/drawing/2014/main" id="{54720576-5F26-4A86-BD20-5FE616801950}"/>
               </a:ext>
             </a:extLst>
           </p:cNvPr>
@@ -3059,7 +3059,7 @@
           <p:cNvPr id="43" name="module-body-ROROLEE-Basic-38">
             <a:extLst xmlns:a="http://schemas.openxmlformats.org/drawingml/2006/main">
               <a:ext uri="{FF2B5EF4-FFF2-40B4-BE49-F238E27FC236}">
-                <a16:creationId xmlns:a16="http://schemas.microsoft.com/office/drawing/2014/main" id="{E7041F40-C6A8-40A0-92BE-0AE6C1E30030}"/>
+                <a16:creationId xmlns:a16="http://schemas.microsoft.com/office/drawing/2014/main" id="{51866FFD-2F6F-4974-B7FE-B268B127C710}"/>
               </a:ext>
             </a:extLst>
           </p:cNvPr>
@@ -3115,7 +3115,7 @@
           <p:cNvPr id="44" name="module-板级固件 / 0x70-39">
             <a:extLst xmlns:a="http://schemas.openxmlformats.org/drawingml/2006/main">
               <a:ext uri="{FF2B5EF4-FFF2-40B4-BE49-F238E27FC236}">
-                <a16:creationId xmlns:a16="http://schemas.microsoft.com/office/drawing/2014/main" id="{C7BF848C-8522-4244-A14A-EAA9A30F555D}"/>
+                <a16:creationId xmlns:a16="http://schemas.microsoft.com/office/drawing/2014/main" id="{0FEB1248-2C27-40D6-A389-E8F5451458F7}"/>
               </a:ext>
             </a:extLst>
           </p:cNvPr>
@@ -3150,7 +3150,7 @@
           <p:cNvPr id="45" name="module-title-板级固件 / 0x70-40">
             <a:extLst xmlns:a="http://schemas.openxmlformats.org/drawingml/2006/main">
               <a:ext uri="{FF2B5EF4-FFF2-40B4-BE49-F238E27FC236}">
-                <a16:creationId xmlns:a16="http://schemas.microsoft.com/office/drawing/2014/main" id="{56740507-342B-4C0A-AD61-C9F8AD38BCDE}"/>
+                <a16:creationId xmlns:a16="http://schemas.microsoft.com/office/drawing/2014/main" id="{3ED2ACD1-E5DD-4D4B-BE74-9FF2DBD64C2A}"/>
               </a:ext>
             </a:extLst>
           </p:cNvPr>
@@ -3206,7 +3206,7 @@
           <p:cNvPr id="46" name="badge-自研-41">
             <a:extLst xmlns:a="http://schemas.openxmlformats.org/drawingml/2006/main">
               <a:ext uri="{FF2B5EF4-FFF2-40B4-BE49-F238E27FC236}">
-                <a16:creationId xmlns:a16="http://schemas.microsoft.com/office/drawing/2014/main" id="{DA78F8EC-3DC7-44F0-A00D-BA2734D64963}"/>
+                <a16:creationId xmlns:a16="http://schemas.microsoft.com/office/drawing/2014/main" id="{A3B32905-CC3F-4FE4-B37B-77AAF7896D07}"/>
               </a:ext>
             </a:extLst>
           </p:cNvPr>
@@ -3241,7 +3241,7 @@
           <p:cNvPr id="47" name="badge-text-自研-42">
             <a:extLst xmlns:a="http://schemas.openxmlformats.org/drawingml/2006/main">
               <a:ext uri="{FF2B5EF4-FFF2-40B4-BE49-F238E27FC236}">
-                <a16:creationId xmlns:a16="http://schemas.microsoft.com/office/drawing/2014/main" id="{3BF2336F-71FB-4912-8CDA-2BB62ED7EE45}"/>
+                <a16:creationId xmlns:a16="http://schemas.microsoft.com/office/drawing/2014/main" id="{733CEDD2-DD73-407D-A981-003D8387A463}"/>
               </a:ext>
             </a:extLst>
           </p:cNvPr>
@@ -3297,7 +3297,7 @@
           <p:cNvPr id="48" name="module-body-板级固件 / 0x70-43">
             <a:extLst xmlns:a="http://schemas.openxmlformats.org/drawingml/2006/main">
               <a:ext uri="{FF2B5EF4-FFF2-40B4-BE49-F238E27FC236}">
-                <a16:creationId xmlns:a16="http://schemas.microsoft.com/office/drawing/2014/main" id="{7A81D9C3-1B00-4340-854D-196666916E69}"/>
+                <a16:creationId xmlns:a16="http://schemas.microsoft.com/office/drawing/2014/main" id="{3A059573-253D-4D3E-A8C7-78833CBCCC1B}"/>
               </a:ext>
             </a:extLst>
           </p:cNvPr>
@@ -3376,7 +3376,7 @@
           <p:cNvPr id="49" name="module-agent_link SDK-44">
             <a:extLst xmlns:a="http://schemas.openxmlformats.org/drawingml/2006/main">
               <a:ext uri="{FF2B5EF4-FFF2-40B4-BE49-F238E27FC236}">
-                <a16:creationId xmlns:a16="http://schemas.microsoft.com/office/drawing/2014/main" id="{8CB0AAF9-94BA-41CE-AED4-5D69FA05ED61}"/>
+                <a16:creationId xmlns:a16="http://schemas.microsoft.com/office/drawing/2014/main" id="{34EE982D-88AF-4290-BCC3-D639701D8B77}"/>
               </a:ext>
             </a:extLst>
           </p:cNvPr>
@@ -3411,7 +3411,7 @@
           <p:cNvPr id="50" name="module-title-agent_link SDK-45">
             <a:extLst xmlns:a="http://schemas.openxmlformats.org/drawingml/2006/main">
               <a:ext uri="{FF2B5EF4-FFF2-40B4-BE49-F238E27FC236}">
-                <a16:creationId xmlns:a16="http://schemas.microsoft.com/office/drawing/2014/main" id="{4A37F249-CD38-49CA-8FC5-CA030DD46E27}"/>
+                <a16:creationId xmlns:a16="http://schemas.microsoft.com/office/drawing/2014/main" id="{90239A13-29D1-4B8B-A0AC-468DB1597256}"/>
               </a:ext>
             </a:extLst>
           </p:cNvPr>
@@ -3467,7 +3467,7 @@
           <p:cNvPr id="51" name="badge-提供-46">
             <a:extLst xmlns:a="http://schemas.openxmlformats.org/drawingml/2006/main">
               <a:ext uri="{FF2B5EF4-FFF2-40B4-BE49-F238E27FC236}">
-                <a16:creationId xmlns:a16="http://schemas.microsoft.com/office/drawing/2014/main" id="{8279CA6E-662B-4B49-B46A-6BC80D02BD4B}"/>
+                <a16:creationId xmlns:a16="http://schemas.microsoft.com/office/drawing/2014/main" id="{9C095011-CAEC-4B21-81A9-770EBF81A9B2}"/>
               </a:ext>
             </a:extLst>
           </p:cNvPr>
@@ -3502,7 +3502,7 @@
           <p:cNvPr id="52" name="badge-text-提供-47">
             <a:extLst xmlns:a="http://schemas.openxmlformats.org/drawingml/2006/main">
               <a:ext uri="{FF2B5EF4-FFF2-40B4-BE49-F238E27FC236}">
-                <a16:creationId xmlns:a16="http://schemas.microsoft.com/office/drawing/2014/main" id="{64DEC4F9-E565-427C-AAB8-334F1972457B}"/>
+                <a16:creationId xmlns:a16="http://schemas.microsoft.com/office/drawing/2014/main" id="{8B6278C9-E05A-4B92-99CE-07153CA6DB67}"/>
               </a:ext>
             </a:extLst>
           </p:cNvPr>
@@ -3558,7 +3558,7 @@
           <p:cNvPr id="53" name="module-body-agent_link SDK-48">
             <a:extLst xmlns:a="http://schemas.openxmlformats.org/drawingml/2006/main">
               <a:ext uri="{FF2B5EF4-FFF2-40B4-BE49-F238E27FC236}">
-                <a16:creationId xmlns:a16="http://schemas.microsoft.com/office/drawing/2014/main" id="{CD9482AF-0308-445B-9910-DAE668E9C97C}"/>
+                <a16:creationId xmlns:a16="http://schemas.microsoft.com/office/drawing/2014/main" id="{CD5C8CC2-A490-4713-807C-807E4276C6B0}"/>
               </a:ext>
             </a:extLst>
           </p:cNvPr>
@@ -3604,7 +3604,7 @@
                 <a:ea typeface="PingFang SC"/>
                 <a:cs typeface="PingFang SC"/>
               </a:rPr>
-              <a:t>push_voice ↑ · audio_out / custom ↓</a:t>
+              <a:t>voice ↑ · audio / custom ↓</a:t>
             </a:r>
           </a:p>
         </p:txBody>
@@ -3614,7 +3614,7 @@
           <p:cNvPr id="54" name="module-App + roro-49">
             <a:extLst xmlns:a="http://schemas.openxmlformats.org/drawingml/2006/main">
               <a:ext uri="{FF2B5EF4-FFF2-40B4-BE49-F238E27FC236}">
-                <a16:creationId xmlns:a16="http://schemas.microsoft.com/office/drawing/2014/main" id="{086D6CD8-147D-4BAF-A3E6-5B5355989E44}"/>
+                <a16:creationId xmlns:a16="http://schemas.microsoft.com/office/drawing/2014/main" id="{01865DFB-AADF-4492-A2B2-FE1FA2C2C0EE}"/>
               </a:ext>
             </a:extLst>
           </p:cNvPr>
@@ -3649,7 +3649,7 @@
           <p:cNvPr id="55" name="module-title-App + roro-50">
             <a:extLst xmlns:a="http://schemas.openxmlformats.org/drawingml/2006/main">
               <a:ext uri="{FF2B5EF4-FFF2-40B4-BE49-F238E27FC236}">
-                <a16:creationId xmlns:a16="http://schemas.microsoft.com/office/drawing/2014/main" id="{99D5A0DE-81FC-496A-915A-8F9FF9CE613E}"/>
+                <a16:creationId xmlns:a16="http://schemas.microsoft.com/office/drawing/2014/main" id="{B542EC2F-BC80-4581-879D-29E498194B91}"/>
               </a:ext>
             </a:extLst>
           </p:cNvPr>
@@ -3705,7 +3705,7 @@
           <p:cNvPr id="56" name="badge-提供-51">
             <a:extLst xmlns:a="http://schemas.openxmlformats.org/drawingml/2006/main">
               <a:ext uri="{FF2B5EF4-FFF2-40B4-BE49-F238E27FC236}">
-                <a16:creationId xmlns:a16="http://schemas.microsoft.com/office/drawing/2014/main" id="{CAEA1C65-510C-4612-8BC5-6C638A337E81}"/>
+                <a16:creationId xmlns:a16="http://schemas.microsoft.com/office/drawing/2014/main" id="{513D46D7-4D3A-43F3-B718-C361B136AED2}"/>
               </a:ext>
             </a:extLst>
           </p:cNvPr>
@@ -3740,7 +3740,7 @@
           <p:cNvPr id="57" name="badge-text-提供-52">
             <a:extLst xmlns:a="http://schemas.openxmlformats.org/drawingml/2006/main">
               <a:ext uri="{FF2B5EF4-FFF2-40B4-BE49-F238E27FC236}">
-                <a16:creationId xmlns:a16="http://schemas.microsoft.com/office/drawing/2014/main" id="{6E8B9CC5-43D9-4ACE-A84C-5FCA8A4CF35D}"/>
+                <a16:creationId xmlns:a16="http://schemas.microsoft.com/office/drawing/2014/main" id="{6397DE36-DAEF-4E70-92E3-1015439E1ECA}"/>
               </a:ext>
             </a:extLst>
           </p:cNvPr>
@@ -3796,7 +3796,7 @@
           <p:cNvPr id="58" name="module-body-App + roro-53">
             <a:extLst xmlns:a="http://schemas.openxmlformats.org/drawingml/2006/main">
               <a:ext uri="{FF2B5EF4-FFF2-40B4-BE49-F238E27FC236}">
-                <a16:creationId xmlns:a16="http://schemas.microsoft.com/office/drawing/2014/main" id="{FAD68AEC-715F-4791-91FF-CDE6113EFD6E}"/>
+                <a16:creationId xmlns:a16="http://schemas.microsoft.com/office/drawing/2014/main" id="{83C6B33A-9806-459A-A124-60584F8973F8}"/>
               </a:ext>
             </a:extLst>
           </p:cNvPr>
@@ -3875,7 +3875,7 @@
           <p:cNvPr id="59" name="module-Shim + Bridge-54">
             <a:extLst xmlns:a="http://schemas.openxmlformats.org/drawingml/2006/main">
               <a:ext uri="{FF2B5EF4-FFF2-40B4-BE49-F238E27FC236}">
-                <a16:creationId xmlns:a16="http://schemas.microsoft.com/office/drawing/2014/main" id="{3B0B44A7-87B2-4EF5-97E3-056E8688BCA0}"/>
+                <a16:creationId xmlns:a16="http://schemas.microsoft.com/office/drawing/2014/main" id="{556CC42A-5E80-4C76-A858-95082A3557CD}"/>
               </a:ext>
             </a:extLst>
           </p:cNvPr>
@@ -3910,7 +3910,7 @@
           <p:cNvPr id="60" name="module-title-Shim + Bridge-55">
             <a:extLst xmlns:a="http://schemas.openxmlformats.org/drawingml/2006/main">
               <a:ext uri="{FF2B5EF4-FFF2-40B4-BE49-F238E27FC236}">
-                <a16:creationId xmlns:a16="http://schemas.microsoft.com/office/drawing/2014/main" id="{CF27FA6A-B128-4802-A5A5-AEA22202B706}"/>
+                <a16:creationId xmlns:a16="http://schemas.microsoft.com/office/drawing/2014/main" id="{812E5449-54F7-4F52-AE8A-5015A3157C3F}"/>
               </a:ext>
             </a:extLst>
           </p:cNvPr>
@@ -3966,7 +3966,7 @@
           <p:cNvPr id="61" name="badge-自研-56">
             <a:extLst xmlns:a="http://schemas.openxmlformats.org/drawingml/2006/main">
               <a:ext uri="{FF2B5EF4-FFF2-40B4-BE49-F238E27FC236}">
-                <a16:creationId xmlns:a16="http://schemas.microsoft.com/office/drawing/2014/main" id="{9A6DF628-61DA-4795-B8C1-5459CE8DAA95}"/>
+                <a16:creationId xmlns:a16="http://schemas.microsoft.com/office/drawing/2014/main" id="{E75891A9-04D1-46F8-BC02-606EE9D45952}"/>
               </a:ext>
             </a:extLst>
           </p:cNvPr>
@@ -4001,7 +4001,7 @@
           <p:cNvPr id="62" name="badge-text-自研-57">
             <a:extLst xmlns:a="http://schemas.openxmlformats.org/drawingml/2006/main">
               <a:ext uri="{FF2B5EF4-FFF2-40B4-BE49-F238E27FC236}">
-                <a16:creationId xmlns:a16="http://schemas.microsoft.com/office/drawing/2014/main" id="{792273FF-E1D5-4D1C-82C1-5CBBAC1559ED}"/>
+                <a16:creationId xmlns:a16="http://schemas.microsoft.com/office/drawing/2014/main" id="{D62445C9-F2A5-4884-B424-D67255AAF6FF}"/>
               </a:ext>
             </a:extLst>
           </p:cNvPr>
@@ -4057,7 +4057,7 @@
           <p:cNvPr id="63" name="module-body-Shim + Bridge-58">
             <a:extLst xmlns:a="http://schemas.openxmlformats.org/drawingml/2006/main">
               <a:ext uri="{FF2B5EF4-FFF2-40B4-BE49-F238E27FC236}">
-                <a16:creationId xmlns:a16="http://schemas.microsoft.com/office/drawing/2014/main" id="{1E19F69A-F80E-4792-97B3-B1A01EF17591}"/>
+                <a16:creationId xmlns:a16="http://schemas.microsoft.com/office/drawing/2014/main" id="{F953E399-79CC-498F-AD6A-D77EBC35963D}"/>
               </a:ext>
             </a:extLst>
           </p:cNvPr>
@@ -4136,7 +4136,7 @@
           <p:cNvPr id="64" name="module-链路配置-59">
             <a:extLst xmlns:a="http://schemas.openxmlformats.org/drawingml/2006/main">
               <a:ext uri="{FF2B5EF4-FFF2-40B4-BE49-F238E27FC236}">
-                <a16:creationId xmlns:a16="http://schemas.microsoft.com/office/drawing/2014/main" id="{0A222F17-F97F-4A96-A704-063ABEE1E737}"/>
+                <a16:creationId xmlns:a16="http://schemas.microsoft.com/office/drawing/2014/main" id="{1B6EF3E2-AC32-4D4C-B4A0-7EE2072C49D3}"/>
               </a:ext>
             </a:extLst>
           </p:cNvPr>
@@ -4171,7 +4171,7 @@
           <p:cNvPr id="65" name="module-title-链路配置-60">
             <a:extLst xmlns:a="http://schemas.openxmlformats.org/drawingml/2006/main">
               <a:ext uri="{FF2B5EF4-FFF2-40B4-BE49-F238E27FC236}">
-                <a16:creationId xmlns:a16="http://schemas.microsoft.com/office/drawing/2014/main" id="{9255931B-3EC0-474F-B716-D7BCE331FD60}"/>
+                <a16:creationId xmlns:a16="http://schemas.microsoft.com/office/drawing/2014/main" id="{EC97DE92-7FFA-482B-A782-BD3B28CC5394}"/>
               </a:ext>
             </a:extLst>
           </p:cNvPr>
@@ -4227,7 +4227,7 @@
           <p:cNvPr id="66" name="badge-配置-61">
             <a:extLst xmlns:a="http://schemas.openxmlformats.org/drawingml/2006/main">
               <a:ext uri="{FF2B5EF4-FFF2-40B4-BE49-F238E27FC236}">
-                <a16:creationId xmlns:a16="http://schemas.microsoft.com/office/drawing/2014/main" id="{491BA067-E59E-42E2-B258-7736BCDC474A}"/>
+                <a16:creationId xmlns:a16="http://schemas.microsoft.com/office/drawing/2014/main" id="{5B9DD1DD-6AE5-4A3D-8657-C0C4C7EC611D}"/>
               </a:ext>
             </a:extLst>
           </p:cNvPr>
@@ -4262,7 +4262,7 @@
           <p:cNvPr id="67" name="badge-text-配置-62">
             <a:extLst xmlns:a="http://schemas.openxmlformats.org/drawingml/2006/main">
               <a:ext uri="{FF2B5EF4-FFF2-40B4-BE49-F238E27FC236}">
-                <a16:creationId xmlns:a16="http://schemas.microsoft.com/office/drawing/2014/main" id="{BCC8DA01-B79A-48F7-847F-158764822DC9}"/>
+                <a16:creationId xmlns:a16="http://schemas.microsoft.com/office/drawing/2014/main" id="{4ABF8778-73E9-4490-833A-6603D4F5D850}"/>
               </a:ext>
             </a:extLst>
           </p:cNvPr>
@@ -4318,7 +4318,7 @@
           <p:cNvPr id="68" name="module-body-链路配置-63">
             <a:extLst xmlns:a="http://schemas.openxmlformats.org/drawingml/2006/main">
               <a:ext uri="{FF2B5EF4-FFF2-40B4-BE49-F238E27FC236}">
-                <a16:creationId xmlns:a16="http://schemas.microsoft.com/office/drawing/2014/main" id="{177FFEB4-9E34-4214-9E50-D2284E28ADC3}"/>
+                <a16:creationId xmlns:a16="http://schemas.microsoft.com/office/drawing/2014/main" id="{5CAE2C28-D691-4EFD-8A65-30CF3A67A875}"/>
               </a:ext>
             </a:extLst>
           </p:cNvPr>
@@ -4364,7 +4364,7 @@
                 <a:ea typeface="PingFang SC"/>
                 <a:cs typeface="PingFang SC"/>
               </a:rPr>
-              <a:t>BLE v1 · Agent / MCP</a:t>
+              <a:t>BLE v1 · MCP 注册</a:t>
             </a:r>
           </a:p>
         </p:txBody>
@@ -4374,7 +4374,7 @@
           <p:cNvPr id="69" name="module-TiDB Agent Stack · 晚晴 Agent-64">
             <a:extLst xmlns:a="http://schemas.openxmlformats.org/drawingml/2006/main">
               <a:ext uri="{FF2B5EF4-FFF2-40B4-BE49-F238E27FC236}">
-                <a16:creationId xmlns:a16="http://schemas.microsoft.com/office/drawing/2014/main" id="{DE0D62CF-F166-4778-BEDD-6BF65C796EF8}"/>
+                <a16:creationId xmlns:a16="http://schemas.microsoft.com/office/drawing/2014/main" id="{98A49860-3FEC-41F8-B2F1-51AFB7B90FDA}"/>
               </a:ext>
             </a:extLst>
           </p:cNvPr>
@@ -4409,7 +4409,7 @@
           <p:cNvPr id="70" name="module-title-TiDB Agent Stack · 晚晴 Agent-65">
             <a:extLst xmlns:a="http://schemas.openxmlformats.org/drawingml/2006/main">
               <a:ext uri="{FF2B5EF4-FFF2-40B4-BE49-F238E27FC236}">
-                <a16:creationId xmlns:a16="http://schemas.microsoft.com/office/drawing/2014/main" id="{5737D409-CB0D-4556-A897-FC0920A9A127}"/>
+                <a16:creationId xmlns:a16="http://schemas.microsoft.com/office/drawing/2014/main" id="{9E96753A-908A-4910-990F-63B2F9A56ABD}"/>
               </a:ext>
             </a:extLst>
           </p:cNvPr>
@@ -4465,7 +4465,7 @@
           <p:cNvPr id="71" name="badge-团队配置-66">
             <a:extLst xmlns:a="http://schemas.openxmlformats.org/drawingml/2006/main">
               <a:ext uri="{FF2B5EF4-FFF2-40B4-BE49-F238E27FC236}">
-                <a16:creationId xmlns:a16="http://schemas.microsoft.com/office/drawing/2014/main" id="{6CC580FE-9D8C-44EF-AF13-1AB9D2847EED}"/>
+                <a16:creationId xmlns:a16="http://schemas.microsoft.com/office/drawing/2014/main" id="{883070F4-EC36-4B2D-A5B8-F602E78F9EB5}"/>
               </a:ext>
             </a:extLst>
           </p:cNvPr>
@@ -4500,7 +4500,7 @@
           <p:cNvPr id="72" name="badge-text-团队配置-67">
             <a:extLst xmlns:a="http://schemas.openxmlformats.org/drawingml/2006/main">
               <a:ext uri="{FF2B5EF4-FFF2-40B4-BE49-F238E27FC236}">
-                <a16:creationId xmlns:a16="http://schemas.microsoft.com/office/drawing/2014/main" id="{617961A8-3BB5-4D16-947D-5A8FFDAA1FF3}"/>
+                <a16:creationId xmlns:a16="http://schemas.microsoft.com/office/drawing/2014/main" id="{E4FF6C25-B82E-4A02-890E-4C6EDDF36C85}"/>
               </a:ext>
             </a:extLst>
           </p:cNvPr>
@@ -4556,7 +4556,7 @@
           <p:cNvPr id="73" name="module-body-TiDB Agent Stack · 晚晴 Agent-68">
             <a:extLst xmlns:a="http://schemas.openxmlformats.org/drawingml/2006/main">
               <a:ext uri="{FF2B5EF4-FFF2-40B4-BE49-F238E27FC236}">
-                <a16:creationId xmlns:a16="http://schemas.microsoft.com/office/drawing/2014/main" id="{2C6D45E8-BB4B-442D-AB0A-71EDEBD0F8FE}"/>
+                <a16:creationId xmlns:a16="http://schemas.microsoft.com/office/drawing/2014/main" id="{EE5AB0CD-EDA5-479F-9742-1BD6D9153E27}"/>
               </a:ext>
             </a:extLst>
           </p:cNvPr>
@@ -4658,7 +4658,7 @@
           <p:cNvPr id="74" name="module-MCP · 5 Tools-69">
             <a:extLst xmlns:a="http://schemas.openxmlformats.org/drawingml/2006/main">
               <a:ext uri="{FF2B5EF4-FFF2-40B4-BE49-F238E27FC236}">
-                <a16:creationId xmlns:a16="http://schemas.microsoft.com/office/drawing/2014/main" id="{261B3C5B-67E9-435A-9DF1-AA4037292192}"/>
+                <a16:creationId xmlns:a16="http://schemas.microsoft.com/office/drawing/2014/main" id="{7358BD3D-B506-4B20-B00B-80DC007E67FA}"/>
               </a:ext>
             </a:extLst>
           </p:cNvPr>
@@ -4693,7 +4693,7 @@
           <p:cNvPr id="75" name="module-title-MCP · 5 Tools-70">
             <a:extLst xmlns:a="http://schemas.openxmlformats.org/drawingml/2006/main">
               <a:ext uri="{FF2B5EF4-FFF2-40B4-BE49-F238E27FC236}">
-                <a16:creationId xmlns:a16="http://schemas.microsoft.com/office/drawing/2014/main" id="{B6B52B01-43D4-4191-B516-3D228E4AA454}"/>
+                <a16:creationId xmlns:a16="http://schemas.microsoft.com/office/drawing/2014/main" id="{18D503FA-F96A-4FD4-BEB7-95438BC8786E}"/>
               </a:ext>
             </a:extLst>
           </p:cNvPr>
@@ -4749,7 +4749,7 @@
           <p:cNvPr id="76" name="badge-自研-71">
             <a:extLst xmlns:a="http://schemas.openxmlformats.org/drawingml/2006/main">
               <a:ext uri="{FF2B5EF4-FFF2-40B4-BE49-F238E27FC236}">
-                <a16:creationId xmlns:a16="http://schemas.microsoft.com/office/drawing/2014/main" id="{8860F6A4-07D4-450A-A0BE-EBEF59FCFB9F}"/>
+                <a16:creationId xmlns:a16="http://schemas.microsoft.com/office/drawing/2014/main" id="{AE595EE8-8622-4F2E-8AFE-8DE617F58BCD}"/>
               </a:ext>
             </a:extLst>
           </p:cNvPr>
@@ -4784,7 +4784,7 @@
           <p:cNvPr id="77" name="badge-text-自研-72">
             <a:extLst xmlns:a="http://schemas.openxmlformats.org/drawingml/2006/main">
               <a:ext uri="{FF2B5EF4-FFF2-40B4-BE49-F238E27FC236}">
-                <a16:creationId xmlns:a16="http://schemas.microsoft.com/office/drawing/2014/main" id="{D609832F-A69A-4374-B826-327367DE386B}"/>
+                <a16:creationId xmlns:a16="http://schemas.microsoft.com/office/drawing/2014/main" id="{166A14C1-0613-4DB7-A3CC-CD7329675455}"/>
               </a:ext>
             </a:extLst>
           </p:cNvPr>
@@ -4840,7 +4840,7 @@
           <p:cNvPr id="78" name="module-body-MCP · 5 Tools-73">
             <a:extLst xmlns:a="http://schemas.openxmlformats.org/drawingml/2006/main">
               <a:ext uri="{FF2B5EF4-FFF2-40B4-BE49-F238E27FC236}">
-                <a16:creationId xmlns:a16="http://schemas.microsoft.com/office/drawing/2014/main" id="{19064033-FCF2-4B95-9BC8-666C587D28F8}"/>
+                <a16:creationId xmlns:a16="http://schemas.microsoft.com/office/drawing/2014/main" id="{465350C2-74F4-403F-9848-230930CA407C}"/>
               </a:ext>
             </a:extLst>
           </p:cNvPr>
@@ -4919,7 +4919,7 @@
           <p:cNvPr id="79" name="module-SQLite-74">
             <a:extLst xmlns:a="http://schemas.openxmlformats.org/drawingml/2006/main">
               <a:ext uri="{FF2B5EF4-FFF2-40B4-BE49-F238E27FC236}">
-                <a16:creationId xmlns:a16="http://schemas.microsoft.com/office/drawing/2014/main" id="{0AEF18FE-DFB1-4E4F-8C30-9801CC2BE539}"/>
+                <a16:creationId xmlns:a16="http://schemas.microsoft.com/office/drawing/2014/main" id="{197239EC-6576-4661-96E6-FEDD1BF72FD0}"/>
               </a:ext>
             </a:extLst>
           </p:cNvPr>
@@ -4954,7 +4954,7 @@
           <p:cNvPr id="80" name="module-title-SQLite-75">
             <a:extLst xmlns:a="http://schemas.openxmlformats.org/drawingml/2006/main">
               <a:ext uri="{FF2B5EF4-FFF2-40B4-BE49-F238E27FC236}">
-                <a16:creationId xmlns:a16="http://schemas.microsoft.com/office/drawing/2014/main" id="{9D721787-3A61-45FD-8501-2C03790C7862}"/>
+                <a16:creationId xmlns:a16="http://schemas.microsoft.com/office/drawing/2014/main" id="{3B26A359-30A2-46C4-AF4E-3D0416F355F7}"/>
               </a:ext>
             </a:extLst>
           </p:cNvPr>
@@ -5010,7 +5010,7 @@
           <p:cNvPr id="81" name="badge-自研-76">
             <a:extLst xmlns:a="http://schemas.openxmlformats.org/drawingml/2006/main">
               <a:ext uri="{FF2B5EF4-FFF2-40B4-BE49-F238E27FC236}">
-                <a16:creationId xmlns:a16="http://schemas.microsoft.com/office/drawing/2014/main" id="{4D87B443-35F0-4340-AE96-09678DE86AEB}"/>
+                <a16:creationId xmlns:a16="http://schemas.microsoft.com/office/drawing/2014/main" id="{DEA3D1DB-2951-43EE-A75D-CA511064472F}"/>
               </a:ext>
             </a:extLst>
           </p:cNvPr>
@@ -5045,7 +5045,7 @@
           <p:cNvPr id="82" name="badge-text-自研-77">
             <a:extLst xmlns:a="http://schemas.openxmlformats.org/drawingml/2006/main">
               <a:ext uri="{FF2B5EF4-FFF2-40B4-BE49-F238E27FC236}">
-                <a16:creationId xmlns:a16="http://schemas.microsoft.com/office/drawing/2014/main" id="{B3DC2138-E1F8-4570-9E4A-94D0F4358B0F}"/>
+                <a16:creationId xmlns:a16="http://schemas.microsoft.com/office/drawing/2014/main" id="{0FC5C511-099D-40E9-B048-B4106BC2ECF2}"/>
               </a:ext>
             </a:extLst>
           </p:cNvPr>
@@ -5101,7 +5101,7 @@
           <p:cNvPr id="83" name="module-body-SQLite-78">
             <a:extLst xmlns:a="http://schemas.openxmlformats.org/drawingml/2006/main">
               <a:ext uri="{FF2B5EF4-FFF2-40B4-BE49-F238E27FC236}">
-                <a16:creationId xmlns:a16="http://schemas.microsoft.com/office/drawing/2014/main" id="{BE6942B7-3121-4150-A237-5531C9DA1DA3}"/>
+                <a16:creationId xmlns:a16="http://schemas.microsoft.com/office/drawing/2014/main" id="{E5F2CD02-D2F4-40FA-A723-6F89D015B8B8}"/>
               </a:ext>
             </a:extLst>
           </p:cNvPr>
@@ -5180,7 +5180,7 @@
           <p:cNvPr id="84" name="module-reminder-pusher：Scheduler → MQTT → App-79">
             <a:extLst xmlns:a="http://schemas.openxmlformats.org/drawingml/2006/main">
               <a:ext uri="{FF2B5EF4-FFF2-40B4-BE49-F238E27FC236}">
-                <a16:creationId xmlns:a16="http://schemas.microsoft.com/office/drawing/2014/main" id="{EFDC9CC2-1C6B-4DAB-B01B-C5E83E57E7D7}"/>
+                <a16:creationId xmlns:a16="http://schemas.microsoft.com/office/drawing/2014/main" id="{483E637D-264D-4887-8F7A-933394C069E9}"/>
               </a:ext>
             </a:extLst>
           </p:cNvPr>
@@ -5215,7 +5215,7 @@
           <p:cNvPr id="85" name="module-title-reminder-pusher：Scheduler → MQTT → App-80">
             <a:extLst xmlns:a="http://schemas.openxmlformats.org/drawingml/2006/main">
               <a:ext uri="{FF2B5EF4-FFF2-40B4-BE49-F238E27FC236}">
-                <a16:creationId xmlns:a16="http://schemas.microsoft.com/office/drawing/2014/main" id="{33A3D409-ACFB-4BF3-A469-150124C3E94D}"/>
+                <a16:creationId xmlns:a16="http://schemas.microsoft.com/office/drawing/2014/main" id="{9DF96CC8-28C1-43DE-A6F6-F085B96BEFAE}"/>
               </a:ext>
             </a:extLst>
           </p:cNvPr>
@@ -5271,7 +5271,7 @@
           <p:cNvPr id="86" name="badge-自研-81">
             <a:extLst xmlns:a="http://schemas.openxmlformats.org/drawingml/2006/main">
               <a:ext uri="{FF2B5EF4-FFF2-40B4-BE49-F238E27FC236}">
-                <a16:creationId xmlns:a16="http://schemas.microsoft.com/office/drawing/2014/main" id="{F9DB9B25-565B-42E2-8CBE-77A9C75C0DF5}"/>
+                <a16:creationId xmlns:a16="http://schemas.microsoft.com/office/drawing/2014/main" id="{6D2E135D-C3F4-4DFA-AC23-750C4047B34A}"/>
               </a:ext>
             </a:extLst>
           </p:cNvPr>
@@ -5306,7 +5306,7 @@
           <p:cNvPr id="87" name="badge-text-自研-82">
             <a:extLst xmlns:a="http://schemas.openxmlformats.org/drawingml/2006/main">
               <a:ext uri="{FF2B5EF4-FFF2-40B4-BE49-F238E27FC236}">
-                <a16:creationId xmlns:a16="http://schemas.microsoft.com/office/drawing/2014/main" id="{BD544253-D7A5-43BD-8EF9-D9324A34CFCE}"/>
+                <a16:creationId xmlns:a16="http://schemas.microsoft.com/office/drawing/2014/main" id="{51C0D034-68E8-48BC-90F7-D4B64B8DDAC9}"/>
               </a:ext>
             </a:extLst>
           </p:cNvPr>
@@ -5362,7 +5362,7 @@
           <p:cNvPr id="88" name="module-body-reminder-pusher：Scheduler → MQTT → App-83">
             <a:extLst xmlns:a="http://schemas.openxmlformats.org/drawingml/2006/main">
               <a:ext uri="{FF2B5EF4-FFF2-40B4-BE49-F238E27FC236}">
-                <a16:creationId xmlns:a16="http://schemas.microsoft.com/office/drawing/2014/main" id="{6303D8C0-70E0-4E5F-B332-931BCD6DEB10}"/>
+                <a16:creationId xmlns:a16="http://schemas.microsoft.com/office/drawing/2014/main" id="{BCD93B65-D6A3-4E28-ADA4-D985EEB9D956}"/>
               </a:ext>
             </a:extLst>
           </p:cNvPr>
@@ -5400,7 +5400,7 @@
           <p:cNvPr id="89" name="output-title-84">
             <a:extLst xmlns:a="http://schemas.openxmlformats.org/drawingml/2006/main">
               <a:ext uri="{FF2B5EF4-FFF2-40B4-BE49-F238E27FC236}">
-                <a16:creationId xmlns:a16="http://schemas.microsoft.com/office/drawing/2014/main" id="{8E518884-AF8C-43B9-B0F7-4342B26E8AC7}"/>
+                <a16:creationId xmlns:a16="http://schemas.microsoft.com/office/drawing/2014/main" id="{A450DEED-A6E7-474D-95D7-70FD46700FB4}"/>
               </a:ext>
             </a:extLst>
           </p:cNvPr>
@@ -5456,7 +5456,7 @@
           <p:cNvPr id="90" name="output-col-a-85">
             <a:extLst xmlns:a="http://schemas.openxmlformats.org/drawingml/2006/main">
               <a:ext uri="{FF2B5EF4-FFF2-40B4-BE49-F238E27FC236}">
-                <a16:creationId xmlns:a16="http://schemas.microsoft.com/office/drawing/2014/main" id="{C0BCE8DD-74B7-4FA4-8EB8-E171F0F99963}"/>
+                <a16:creationId xmlns:a16="http://schemas.microsoft.com/office/drawing/2014/main" id="{EC11A428-FD5D-4B79-8A48-DD585B2C270B}"/>
               </a:ext>
             </a:extLst>
           </p:cNvPr>
@@ -5540,7 +5540,7 @@
           <p:cNvPr id="91" name="output-col-b-86">
             <a:extLst xmlns:a="http://schemas.openxmlformats.org/drawingml/2006/main">
               <a:ext uri="{FF2B5EF4-FFF2-40B4-BE49-F238E27FC236}">
-                <a16:creationId xmlns:a16="http://schemas.microsoft.com/office/drawing/2014/main" id="{7E1AF087-B2DB-4D44-B997-DD965F877241}"/>
+                <a16:creationId xmlns:a16="http://schemas.microsoft.com/office/drawing/2014/main" id="{C25EE3DE-BE98-4713-86C1-96260702058C}"/>
               </a:ext>
             </a:extLst>
           </p:cNvPr>
@@ -5624,7 +5624,7 @@
           <p:cNvPr id="92" name="mapping-title-87">
             <a:extLst xmlns:a="http://schemas.openxmlformats.org/drawingml/2006/main">
               <a:ext uri="{FF2B5EF4-FFF2-40B4-BE49-F238E27FC236}">
-                <a16:creationId xmlns:a16="http://schemas.microsoft.com/office/drawing/2014/main" id="{37B5812F-5711-4CB6-9506-4BA3571C7FEA}"/>
+                <a16:creationId xmlns:a16="http://schemas.microsoft.com/office/drawing/2014/main" id="{04C7A6BF-1DE9-4A56-BC2D-49A5990BEEFC}"/>
               </a:ext>
             </a:extLst>
           </p:cNvPr>
@@ -5680,7 +5680,7 @@
           <p:cNvPr id="93" name="map-h1-88">
             <a:extLst xmlns:a="http://schemas.openxmlformats.org/drawingml/2006/main">
               <a:ext uri="{FF2B5EF4-FFF2-40B4-BE49-F238E27FC236}">
-                <a16:creationId xmlns:a16="http://schemas.microsoft.com/office/drawing/2014/main" id="{C62B7BA4-30E6-4DD1-AE68-CF37475AFF30}"/>
+                <a16:creationId xmlns:a16="http://schemas.microsoft.com/office/drawing/2014/main" id="{9F3FA9D4-E2C5-4922-9A65-85E311CCF928}"/>
               </a:ext>
             </a:extLst>
           </p:cNvPr>
@@ -5736,7 +5736,7 @@
           <p:cNvPr id="94" name="map-h2-89">
             <a:extLst xmlns:a="http://schemas.openxmlformats.org/drawingml/2006/main">
               <a:ext uri="{FF2B5EF4-FFF2-40B4-BE49-F238E27FC236}">
-                <a16:creationId xmlns:a16="http://schemas.microsoft.com/office/drawing/2014/main" id="{659A0595-9176-4667-A3EF-23AAE75CFC54}"/>
+                <a16:creationId xmlns:a16="http://schemas.microsoft.com/office/drawing/2014/main" id="{B1D6C009-D684-4C47-8482-DB5A7C5A70F6}"/>
               </a:ext>
             </a:extLst>
           </p:cNvPr>
@@ -5792,7 +5792,7 @@
           <p:cNvPr id="95" name="map-h3-90">
             <a:extLst xmlns:a="http://schemas.openxmlformats.org/drawingml/2006/main">
               <a:ext uri="{FF2B5EF4-FFF2-40B4-BE49-F238E27FC236}">
-                <a16:creationId xmlns:a16="http://schemas.microsoft.com/office/drawing/2014/main" id="{59355C99-C463-49F3-A6B5-AB6852164F00}"/>
+                <a16:creationId xmlns:a16="http://schemas.microsoft.com/office/drawing/2014/main" id="{20E0AA32-5DAF-4FED-92C3-0CAA9E17B2AE}"/>
               </a:ext>
             </a:extLst>
           </p:cNvPr>
@@ -5848,7 +5848,7 @@
           <p:cNvPr id="96" name="map-rule-1-91">
             <a:extLst xmlns:a="http://schemas.openxmlformats.org/drawingml/2006/main">
               <a:ext uri="{FF2B5EF4-FFF2-40B4-BE49-F238E27FC236}">
-                <a16:creationId xmlns:a16="http://schemas.microsoft.com/office/drawing/2014/main" id="{3C69282D-E833-4C2F-AA32-3D52AAF28129}"/>
+                <a16:creationId xmlns:a16="http://schemas.microsoft.com/office/drawing/2014/main" id="{F2759FC2-F0E7-4350-A313-43EF490A9BB9}"/>
               </a:ext>
             </a:extLst>
           </p:cNvPr>
@@ -5881,7 +5881,7 @@
           <p:cNvPr id="97" name="map-r1c1-92">
             <a:extLst xmlns:a="http://schemas.openxmlformats.org/drawingml/2006/main">
               <a:ext uri="{FF2B5EF4-FFF2-40B4-BE49-F238E27FC236}">
-                <a16:creationId xmlns:a16="http://schemas.microsoft.com/office/drawing/2014/main" id="{A476CCAC-CE70-49D1-960C-D866D5B61F7F}"/>
+                <a16:creationId xmlns:a16="http://schemas.microsoft.com/office/drawing/2014/main" id="{109DE945-73E7-43A1-ABDE-CAD8DDDAE2C7}"/>
               </a:ext>
             </a:extLst>
           </p:cNvPr>
@@ -5937,7 +5937,7 @@
           <p:cNvPr id="98" name="map-r1c2-93">
             <a:extLst xmlns:a="http://schemas.openxmlformats.org/drawingml/2006/main">
               <a:ext uri="{FF2B5EF4-FFF2-40B4-BE49-F238E27FC236}">
-                <a16:creationId xmlns:a16="http://schemas.microsoft.com/office/drawing/2014/main" id="{37C57BB6-98F2-4B1D-ACA7-2505C7EE6DCE}"/>
+                <a16:creationId xmlns:a16="http://schemas.microsoft.com/office/drawing/2014/main" id="{995334E5-005E-4E0B-B6B7-0D4BBB56F21A}"/>
               </a:ext>
             </a:extLst>
           </p:cNvPr>
@@ -5993,7 +5993,7 @@
           <p:cNvPr id="99" name="map-r1c3-94">
             <a:extLst xmlns:a="http://schemas.openxmlformats.org/drawingml/2006/main">
               <a:ext uri="{FF2B5EF4-FFF2-40B4-BE49-F238E27FC236}">
-                <a16:creationId xmlns:a16="http://schemas.microsoft.com/office/drawing/2014/main" id="{2EE73412-0BF9-40C5-8BF1-EC48D6770398}"/>
+                <a16:creationId xmlns:a16="http://schemas.microsoft.com/office/drawing/2014/main" id="{397111E2-DAF8-4E35-989A-432B1AA29A7D}"/>
               </a:ext>
             </a:extLst>
           </p:cNvPr>
@@ -6049,7 +6049,7 @@
           <p:cNvPr id="100" name="map-r2c1-95">
             <a:extLst xmlns:a="http://schemas.openxmlformats.org/drawingml/2006/main">
               <a:ext uri="{FF2B5EF4-FFF2-40B4-BE49-F238E27FC236}">
-                <a16:creationId xmlns:a16="http://schemas.microsoft.com/office/drawing/2014/main" id="{2851AADA-9001-4525-9482-604F322E94E0}"/>
+                <a16:creationId xmlns:a16="http://schemas.microsoft.com/office/drawing/2014/main" id="{7235CCD6-53E8-4288-A983-E5E7BEFE6772}"/>
               </a:ext>
             </a:extLst>
           </p:cNvPr>
@@ -6105,7 +6105,7 @@
           <p:cNvPr id="101" name="map-r2c2-96">
             <a:extLst xmlns:a="http://schemas.openxmlformats.org/drawingml/2006/main">
               <a:ext uri="{FF2B5EF4-FFF2-40B4-BE49-F238E27FC236}">
-                <a16:creationId xmlns:a16="http://schemas.microsoft.com/office/drawing/2014/main" id="{DCB6C7AA-D460-4DB1-B17D-2FE96767F974}"/>
+                <a16:creationId xmlns:a16="http://schemas.microsoft.com/office/drawing/2014/main" id="{D0AE5BAD-268F-405A-919B-F0839110E503}"/>
               </a:ext>
             </a:extLst>
           </p:cNvPr>
@@ -6161,7 +6161,7 @@
           <p:cNvPr id="102" name="map-r2c3-97">
             <a:extLst xmlns:a="http://schemas.openxmlformats.org/drawingml/2006/main">
               <a:ext uri="{FF2B5EF4-FFF2-40B4-BE49-F238E27FC236}">
-                <a16:creationId xmlns:a16="http://schemas.microsoft.com/office/drawing/2014/main" id="{FF4BABCF-409C-4CE2-A24D-ECC1E11BC621}"/>
+                <a16:creationId xmlns:a16="http://schemas.microsoft.com/office/drawing/2014/main" id="{F13D59CC-AF37-49A6-A440-5F15DF7CC192}"/>
               </a:ext>
             </a:extLst>
           </p:cNvPr>
@@ -6217,7 +6217,7 @@
           <p:cNvPr id="103" name="map-r3c1-98">
             <a:extLst xmlns:a="http://schemas.openxmlformats.org/drawingml/2006/main">
               <a:ext uri="{FF2B5EF4-FFF2-40B4-BE49-F238E27FC236}">
-                <a16:creationId xmlns:a16="http://schemas.microsoft.com/office/drawing/2014/main" id="{3B29AC81-7C06-4D06-85F2-67A80A650DFC}"/>
+                <a16:creationId xmlns:a16="http://schemas.microsoft.com/office/drawing/2014/main" id="{19559B6D-A453-451D-872D-EAE84C552E7A}"/>
               </a:ext>
             </a:extLst>
           </p:cNvPr>
@@ -6273,7 +6273,7 @@
           <p:cNvPr id="104" name="map-r3c2-99">
             <a:extLst xmlns:a="http://schemas.openxmlformats.org/drawingml/2006/main">
               <a:ext uri="{FF2B5EF4-FFF2-40B4-BE49-F238E27FC236}">
-                <a16:creationId xmlns:a16="http://schemas.microsoft.com/office/drawing/2014/main" id="{A26934AB-7FE9-4738-B396-70182BC700AC}"/>
+                <a16:creationId xmlns:a16="http://schemas.microsoft.com/office/drawing/2014/main" id="{23C0AA1D-C9B5-4AF6-8A55-0FD60FED08E6}"/>
               </a:ext>
             </a:extLst>
           </p:cNvPr>
@@ -6329,7 +6329,7 @@
           <p:cNvPr id="105" name="map-r3c3-100">
             <a:extLst xmlns:a="http://schemas.openxmlformats.org/drawingml/2006/main">
               <a:ext uri="{FF2B5EF4-FFF2-40B4-BE49-F238E27FC236}">
-                <a16:creationId xmlns:a16="http://schemas.microsoft.com/office/drawing/2014/main" id="{CD8F113B-531E-4F12-84C8-B83AE8993C4E}"/>
+                <a16:creationId xmlns:a16="http://schemas.microsoft.com/office/drawing/2014/main" id="{042A1BEF-3DC2-4B88-9026-19234C43629C}"/>
               </a:ext>
             </a:extLst>
           </p:cNvPr>
@@ -6385,7 +6385,7 @@
           <p:cNvPr id="106" name="caveat-101">
             <a:extLst xmlns:a="http://schemas.openxmlformats.org/drawingml/2006/main">
               <a:ext uri="{FF2B5EF4-FFF2-40B4-BE49-F238E27FC236}">
-                <a16:creationId xmlns:a16="http://schemas.microsoft.com/office/drawing/2014/main" id="{FB270075-1222-4924-9432-DFEDBAB7365A}"/>
+                <a16:creationId xmlns:a16="http://schemas.microsoft.com/office/drawing/2014/main" id="{06B38571-3BEA-46A7-A77B-41BBF1B02F39}"/>
               </a:ext>
             </a:extLst>
           </p:cNvPr>
@@ -6439,7 +6439,7 @@
     </p:spTree>
     <p:extLst>
       <p:ext uri="{BB962C8B-B14F-4D97-AF65-F5344CB8AC3E}">
-        <p14:creationId xmlns:p14="http://schemas.microsoft.com/office/powerpoint/2010/main" val="598008841"/>
+        <p14:creationId xmlns:p14="http://schemas.microsoft.com/office/powerpoint/2010/main" val="1341932444"/>
       </p:ext>
     </p:extLst>
   </p:cSld>
